--- a/ads/projeto-software-seguranca-informacao/2026/projeto-software/Aula07-HerançaPolimorfismo/Herança e Porlimosfismo.pptx
+++ b/ads/projeto-software-seguranca-informacao/2026/projeto-software/Aula07-HerançaPolimorfismo/Herança e Porlimosfismo.pptx
@@ -5,7 +5,7 @@
     <p:sldMasterId id="2147483677" r:id="rId1"/>
   </p:sldMasterIdLst>
   <p:notesMasterIdLst>
-    <p:notesMasterId r:id="rId15"/>
+    <p:notesMasterId r:id="rId17"/>
   </p:notesMasterIdLst>
   <p:sldIdLst>
     <p:sldId id="256" r:id="rId2"/>
@@ -19,8 +19,10 @@
     <p:sldId id="260" r:id="rId10"/>
     <p:sldId id="264" r:id="rId11"/>
     <p:sldId id="265" r:id="rId12"/>
-    <p:sldId id="262" r:id="rId13"/>
-    <p:sldId id="263" r:id="rId14"/>
+    <p:sldId id="271" r:id="rId13"/>
+    <p:sldId id="272" r:id="rId14"/>
+    <p:sldId id="262" r:id="rId15"/>
+    <p:sldId id="263" r:id="rId16"/>
   </p:sldIdLst>
   <p:sldSz cx="12192000" cy="6858000"/>
   <p:notesSz cx="6858000" cy="9144000"/>
@@ -232,7 +234,7 @@
           <a:p>
             <a:fld id="{FCBB45FB-FC1C-4893-B550-48C1193193C6}" type="datetimeFigureOut">
               <a:rPr lang="pt-BR" smtClean="0"/>
-              <a:t>18/03/2026</a:t>
+              <a:t>13/09/2026</a:t>
             </a:fld>
             <a:endParaRPr lang="pt-BR"/>
           </a:p>
@@ -935,7 +937,7 @@
           <a:p>
             <a:fld id="{CDD55C27-F8C6-4481-8569-CAC50CAE9F1F}" type="datetimeFigureOut">
               <a:rPr lang="pt-BR" smtClean="0"/>
-              <a:t>18/03/2026</a:t>
+              <a:t>13/09/2026</a:t>
             </a:fld>
             <a:endParaRPr lang="pt-BR"/>
           </a:p>
@@ -1434,7 +1436,7 @@
           <a:p>
             <a:fld id="{CDD55C27-F8C6-4481-8569-CAC50CAE9F1F}" type="datetimeFigureOut">
               <a:rPr lang="pt-BR" smtClean="0"/>
-              <a:t>18/03/2026</a:t>
+              <a:t>13/09/2026</a:t>
             </a:fld>
             <a:endParaRPr lang="pt-BR"/>
           </a:p>
@@ -1737,7 +1739,7 @@
           <a:p>
             <a:fld id="{CDD55C27-F8C6-4481-8569-CAC50CAE9F1F}" type="datetimeFigureOut">
               <a:rPr lang="pt-BR" smtClean="0"/>
-              <a:t>18/03/2026</a:t>
+              <a:t>13/09/2026</a:t>
             </a:fld>
             <a:endParaRPr lang="pt-BR"/>
           </a:p>
@@ -2188,7 +2190,7 @@
           <a:p>
             <a:fld id="{CDD55C27-F8C6-4481-8569-CAC50CAE9F1F}" type="datetimeFigureOut">
               <a:rPr lang="pt-BR" smtClean="0"/>
-              <a:t>18/03/2026</a:t>
+              <a:t>13/09/2026</a:t>
             </a:fld>
             <a:endParaRPr lang="pt-BR"/>
           </a:p>
@@ -2361,7 +2363,7 @@
           <a:p>
             <a:fld id="{CDD55C27-F8C6-4481-8569-CAC50CAE9F1F}" type="datetimeFigureOut">
               <a:rPr lang="pt-BR" smtClean="0"/>
-              <a:t>18/03/2026</a:t>
+              <a:t>13/09/2026</a:t>
             </a:fld>
             <a:endParaRPr lang="pt-BR"/>
           </a:p>
@@ -2498,7 +2500,7 @@
           <a:p>
             <a:fld id="{CDD55C27-F8C6-4481-8569-CAC50CAE9F1F}" type="datetimeFigureOut">
               <a:rPr lang="pt-BR" smtClean="0"/>
-              <a:t>18/03/2026</a:t>
+              <a:t>13/09/2026</a:t>
             </a:fld>
             <a:endParaRPr lang="pt-BR"/>
           </a:p>
@@ -2842,7 +2844,7 @@
           <a:p>
             <a:fld id="{CDD55C27-F8C6-4481-8569-CAC50CAE9F1F}" type="datetimeFigureOut">
               <a:rPr lang="pt-BR" smtClean="0"/>
-              <a:t>18/03/2026</a:t>
+              <a:t>13/09/2026</a:t>
             </a:fld>
             <a:endParaRPr lang="pt-BR"/>
           </a:p>
@@ -3163,7 +3165,7 @@
           <a:p>
             <a:fld id="{CDD55C27-F8C6-4481-8569-CAC50CAE9F1F}" type="datetimeFigureOut">
               <a:rPr lang="pt-BR" smtClean="0"/>
-              <a:t>18/03/2026</a:t>
+              <a:t>13/09/2026</a:t>
             </a:fld>
             <a:endParaRPr lang="pt-BR"/>
           </a:p>
@@ -3846,7 +3848,7 @@
             </a:r>
           </a:p>
           <a:p>
-            <a:endParaRPr lang="pt-BR" dirty="0"/>
+            <a:endParaRPr lang="pt-BR" b="1" dirty="0"/>
           </a:p>
           <a:p>
             <a:pPr lvl="1"/>
@@ -5285,7 +5287,7 @@
           <p:cNvPr id="2" name="Título 1">
             <a:extLst>
               <a:ext uri="{FF2B5EF4-FFF2-40B4-BE49-F238E27FC236}">
-                <a16:creationId xmlns:a16="http://schemas.microsoft.com/office/drawing/2014/main" id="{98F55CF7-7DD5-478F-8B89-574E79ED855F}"/>
+                <a16:creationId xmlns:a16="http://schemas.microsoft.com/office/drawing/2014/main" id="{911091BA-DD43-4657-B572-B91CCC98BF29}"/>
               </a:ext>
             </a:extLst>
           </p:cNvPr>
@@ -5303,6 +5305,1050 @@
           <a:p>
             <a:r>
               <a:rPr lang="pt-BR" dirty="0"/>
+              <a:t>O que é uma interface?</a:t>
+            </a:r>
+          </a:p>
+        </p:txBody>
+      </p:sp>
+      <p:sp>
+        <p:nvSpPr>
+          <p:cNvPr id="3" name="Espaço Reservado para Conteúdo 2">
+            <a:extLst>
+              <a:ext uri="{FF2B5EF4-FFF2-40B4-BE49-F238E27FC236}">
+                <a16:creationId xmlns:a16="http://schemas.microsoft.com/office/drawing/2014/main" id="{F4337037-3AAA-4224-934A-6D36B646B4FC}"/>
+              </a:ext>
+            </a:extLst>
+          </p:cNvPr>
+          <p:cNvSpPr>
+            <a:spLocks noGrp="1"/>
+          </p:cNvSpPr>
+          <p:nvPr>
+            <p:ph idx="1"/>
+          </p:nvPr>
+        </p:nvSpPr>
+        <p:spPr>
+          <a:xfrm>
+            <a:off x="6671414" y="1862667"/>
+            <a:ext cx="5021053" cy="4485746"/>
+          </a:xfrm>
+        </p:spPr>
+        <p:txBody>
+          <a:bodyPr/>
+          <a:lstStyle/>
+          <a:p>
+            <a:r>
+              <a:rPr lang="pt-BR" sz="1800" dirty="0"/>
+              <a:t>Uma </a:t>
+            </a:r>
+            <a:r>
+              <a:rPr lang="pt-BR" sz="1800" b="1" dirty="0"/>
+              <a:t>interface é um contrato que define comportamentos que uma classe deve oferecer</a:t>
+            </a:r>
+            <a:r>
+              <a:rPr lang="pt-BR" sz="1800" dirty="0"/>
+              <a:t>.</a:t>
+            </a:r>
+          </a:p>
+          <a:p>
+            <a:endParaRPr lang="pt-BR" sz="1800" dirty="0"/>
+          </a:p>
+          <a:p>
+            <a:r>
+              <a:rPr lang="pt-BR" sz="1800" dirty="0"/>
+              <a:t>Ela estabelece o que um objeto precisa ser capaz de fazer. Cada classe fica responsável por implementar como esse comportamento acontece.</a:t>
+            </a:r>
+          </a:p>
+        </p:txBody>
+      </p:sp>
+      <p:sp>
+        <p:nvSpPr>
+          <p:cNvPr id="4" name="Espaço Reservado para Conteúdo 2">
+            <a:extLst>
+              <a:ext uri="{FF2B5EF4-FFF2-40B4-BE49-F238E27FC236}">
+                <a16:creationId xmlns:a16="http://schemas.microsoft.com/office/drawing/2014/main" id="{2EF2417A-8AA2-4917-AE6B-E7ACD71A84DF}"/>
+              </a:ext>
+            </a:extLst>
+          </p:cNvPr>
+          <p:cNvSpPr txBox="1">
+            <a:spLocks/>
+          </p:cNvSpPr>
+          <p:nvPr/>
+        </p:nvSpPr>
+        <p:spPr>
+          <a:xfrm>
+            <a:off x="744747" y="1862667"/>
+            <a:ext cx="5021053" cy="4485746"/>
+          </a:xfrm>
+          <a:prstGeom prst="rect">
+            <a:avLst/>
+          </a:prstGeom>
+        </p:spPr>
+        <p:txBody>
+          <a:bodyPr/>
+          <a:lstStyle>
+            <a:lvl1pPr marL="0" indent="0" algn="just" defTabSz="914400" rtl="0" eaLnBrk="1" latinLnBrk="0" hangingPunct="1">
+              <a:lnSpc>
+                <a:spcPct val="150000"/>
+              </a:lnSpc>
+              <a:spcBef>
+                <a:spcPts val="0"/>
+              </a:spcBef>
+              <a:buFont typeface="Arial" panose="020B0604020202020204" pitchFamily="34" charset="0"/>
+              <a:buNone/>
+              <a:defRPr sz="2000" kern="1200">
+                <a:solidFill>
+                  <a:schemeClr val="tx1"/>
+                </a:solidFill>
+                <a:latin typeface="Times New Roman" panose="02020603050405020304" pitchFamily="18" charset="0"/>
+                <a:ea typeface="+mn-ea"/>
+                <a:cs typeface="Times New Roman" panose="02020603050405020304" pitchFamily="18" charset="0"/>
+              </a:defRPr>
+            </a:lvl1pPr>
+            <a:lvl2pPr marL="685800" indent="-228600" algn="just" defTabSz="914400" rtl="0" eaLnBrk="1" latinLnBrk="0" hangingPunct="1">
+              <a:lnSpc>
+                <a:spcPct val="150000"/>
+              </a:lnSpc>
+              <a:spcBef>
+                <a:spcPts val="500"/>
+              </a:spcBef>
+              <a:buFont typeface="Arial" panose="020B0604020202020204" pitchFamily="34" charset="0"/>
+              <a:buChar char="•"/>
+              <a:defRPr sz="1600" kern="1200">
+                <a:solidFill>
+                  <a:schemeClr val="tx1"/>
+                </a:solidFill>
+                <a:latin typeface="Times New Roman" panose="02020603050405020304" pitchFamily="18" charset="0"/>
+                <a:ea typeface="+mn-ea"/>
+                <a:cs typeface="Times New Roman" panose="02020603050405020304" pitchFamily="18" charset="0"/>
+              </a:defRPr>
+            </a:lvl2pPr>
+            <a:lvl3pPr marL="1143000" indent="-228600" algn="just" defTabSz="914400" rtl="0" eaLnBrk="1" latinLnBrk="0" hangingPunct="1">
+              <a:lnSpc>
+                <a:spcPct val="150000"/>
+              </a:lnSpc>
+              <a:spcBef>
+                <a:spcPts val="500"/>
+              </a:spcBef>
+              <a:buFont typeface="Arial" panose="020B0604020202020204" pitchFamily="34" charset="0"/>
+              <a:buChar char="•"/>
+              <a:defRPr sz="1400" kern="1200">
+                <a:solidFill>
+                  <a:schemeClr val="tx1"/>
+                </a:solidFill>
+                <a:latin typeface="Times New Roman" panose="02020603050405020304" pitchFamily="18" charset="0"/>
+                <a:ea typeface="+mn-ea"/>
+                <a:cs typeface="Times New Roman" panose="02020603050405020304" pitchFamily="18" charset="0"/>
+              </a:defRPr>
+            </a:lvl3pPr>
+            <a:lvl4pPr marL="1600200" indent="-228600" algn="just" defTabSz="914400" rtl="0" eaLnBrk="1" latinLnBrk="0" hangingPunct="1">
+              <a:lnSpc>
+                <a:spcPct val="150000"/>
+              </a:lnSpc>
+              <a:spcBef>
+                <a:spcPts val="0"/>
+              </a:spcBef>
+              <a:buFont typeface="Arial" panose="020B0604020202020204" pitchFamily="34" charset="0"/>
+              <a:buChar char="•"/>
+              <a:defRPr sz="1200" kern="1200">
+                <a:solidFill>
+                  <a:schemeClr val="tx1"/>
+                </a:solidFill>
+                <a:latin typeface="Times New Roman" panose="02020603050405020304" pitchFamily="18" charset="0"/>
+                <a:ea typeface="+mn-ea"/>
+                <a:cs typeface="Times New Roman" panose="02020603050405020304" pitchFamily="18" charset="0"/>
+              </a:defRPr>
+            </a:lvl4pPr>
+            <a:lvl5pPr marL="2057400" indent="-228600" algn="just" defTabSz="914400" rtl="0" eaLnBrk="1" latinLnBrk="0" hangingPunct="1">
+              <a:lnSpc>
+                <a:spcPct val="150000"/>
+              </a:lnSpc>
+              <a:spcBef>
+                <a:spcPts val="0"/>
+              </a:spcBef>
+              <a:buFont typeface="Arial" panose="020B0604020202020204" pitchFamily="34" charset="0"/>
+              <a:buChar char="•"/>
+              <a:defRPr sz="1000" kern="1200">
+                <a:solidFill>
+                  <a:schemeClr val="tx1"/>
+                </a:solidFill>
+                <a:latin typeface="Times New Roman" panose="02020603050405020304" pitchFamily="18" charset="0"/>
+                <a:ea typeface="+mn-ea"/>
+                <a:cs typeface="Times New Roman" panose="02020603050405020304" pitchFamily="18" charset="0"/>
+              </a:defRPr>
+            </a:lvl5pPr>
+            <a:lvl6pPr marL="2514600" indent="-228600" algn="l" defTabSz="914400" rtl="0" eaLnBrk="1" latinLnBrk="0" hangingPunct="1">
+              <a:lnSpc>
+                <a:spcPct val="90000"/>
+              </a:lnSpc>
+              <a:spcBef>
+                <a:spcPts val="500"/>
+              </a:spcBef>
+              <a:buFont typeface="Arial" panose="020B0604020202020204" pitchFamily="34" charset="0"/>
+              <a:buChar char="•"/>
+              <a:defRPr sz="1800" kern="1200">
+                <a:solidFill>
+                  <a:schemeClr val="tx1"/>
+                </a:solidFill>
+                <a:latin typeface="+mn-lt"/>
+                <a:ea typeface="+mn-ea"/>
+                <a:cs typeface="+mn-cs"/>
+              </a:defRPr>
+            </a:lvl6pPr>
+            <a:lvl7pPr marL="2971800" indent="-228600" algn="l" defTabSz="914400" rtl="0" eaLnBrk="1" latinLnBrk="0" hangingPunct="1">
+              <a:lnSpc>
+                <a:spcPct val="90000"/>
+              </a:lnSpc>
+              <a:spcBef>
+                <a:spcPts val="500"/>
+              </a:spcBef>
+              <a:buFont typeface="Arial" panose="020B0604020202020204" pitchFamily="34" charset="0"/>
+              <a:buChar char="•"/>
+              <a:defRPr sz="1800" kern="1200">
+                <a:solidFill>
+                  <a:schemeClr val="tx1"/>
+                </a:solidFill>
+                <a:latin typeface="+mn-lt"/>
+                <a:ea typeface="+mn-ea"/>
+                <a:cs typeface="+mn-cs"/>
+              </a:defRPr>
+            </a:lvl7pPr>
+            <a:lvl8pPr marL="3429000" indent="-228600" algn="l" defTabSz="914400" rtl="0" eaLnBrk="1" latinLnBrk="0" hangingPunct="1">
+              <a:lnSpc>
+                <a:spcPct val="90000"/>
+              </a:lnSpc>
+              <a:spcBef>
+                <a:spcPts val="500"/>
+              </a:spcBef>
+              <a:buFont typeface="Arial" panose="020B0604020202020204" pitchFamily="34" charset="0"/>
+              <a:buChar char="•"/>
+              <a:defRPr sz="1800" kern="1200">
+                <a:solidFill>
+                  <a:schemeClr val="tx1"/>
+                </a:solidFill>
+                <a:latin typeface="+mn-lt"/>
+                <a:ea typeface="+mn-ea"/>
+                <a:cs typeface="+mn-cs"/>
+              </a:defRPr>
+            </a:lvl8pPr>
+            <a:lvl9pPr marL="3886200" indent="-228600" algn="l" defTabSz="914400" rtl="0" eaLnBrk="1" latinLnBrk="0" hangingPunct="1">
+              <a:lnSpc>
+                <a:spcPct val="90000"/>
+              </a:lnSpc>
+              <a:spcBef>
+                <a:spcPts val="500"/>
+              </a:spcBef>
+              <a:buFont typeface="Arial" panose="020B0604020202020204" pitchFamily="34" charset="0"/>
+              <a:buChar char="•"/>
+              <a:defRPr sz="1800" kern="1200">
+                <a:solidFill>
+                  <a:schemeClr val="tx1"/>
+                </a:solidFill>
+                <a:latin typeface="+mn-lt"/>
+                <a:ea typeface="+mn-ea"/>
+                <a:cs typeface="+mn-cs"/>
+              </a:defRPr>
+            </a:lvl9pPr>
+          </a:lstStyle>
+          <a:p>
+            <a:r>
+              <a:rPr lang="pt-BR" sz="1800" dirty="0"/>
+              <a:t>Como garantir que classes diferentes tenham determinado comportamento, mesmo que elas não herdem da mesma classe?</a:t>
+            </a:r>
+          </a:p>
+          <a:p>
+            <a:endParaRPr lang="pt-BR" sz="1800" dirty="0"/>
+          </a:p>
+          <a:p>
+            <a:r>
+              <a:rPr lang="pt-BR" sz="1800" dirty="0"/>
+              <a:t>Por exemplo, Carro e Drone são objetos diferentes, mas ambos podem ser controlados remotamente. </a:t>
+            </a:r>
+          </a:p>
+          <a:p>
+            <a:endParaRPr lang="pt-BR" sz="1800" dirty="0"/>
+          </a:p>
+          <a:p>
+            <a:r>
+              <a:rPr lang="pt-BR" sz="1800" dirty="0"/>
+              <a:t>Uma interface pode estabelecer quais operações uma classe precisa oferecer para ter essa capacidade.</a:t>
+            </a:r>
+          </a:p>
+        </p:txBody>
+      </p:sp>
+    </p:spTree>
+    <p:extLst>
+      <p:ext uri="{BB962C8B-B14F-4D97-AF65-F5344CB8AC3E}">
+        <p14:creationId xmlns:p14="http://schemas.microsoft.com/office/powerpoint/2010/main" val="2269495799"/>
+      </p:ext>
+    </p:extLst>
+  </p:cSld>
+  <p:clrMapOvr>
+    <a:masterClrMapping/>
+  </p:clrMapOvr>
+</p:sld>
+</file>
+
+<file path=ppt/slides/slide13.xml><?xml version="1.0" encoding="utf-8"?>
+<p:sld xmlns:a="http://schemas.openxmlformats.org/drawingml/2006/main" xmlns:r="http://schemas.openxmlformats.org/officeDocument/2006/relationships" xmlns:p="http://schemas.openxmlformats.org/presentationml/2006/main">
+  <p:cSld>
+    <p:spTree>
+      <p:nvGrpSpPr>
+        <p:cNvPr id="1" name=""/>
+        <p:cNvGrpSpPr/>
+        <p:nvPr/>
+      </p:nvGrpSpPr>
+      <p:grpSpPr>
+        <a:xfrm>
+          <a:off x="0" y="0"/>
+          <a:ext cx="0" cy="0"/>
+          <a:chOff x="0" y="0"/>
+          <a:chExt cx="0" cy="0"/>
+        </a:xfrm>
+      </p:grpSpPr>
+      <p:sp>
+        <p:nvSpPr>
+          <p:cNvPr id="2" name="Título 1">
+            <a:extLst>
+              <a:ext uri="{FF2B5EF4-FFF2-40B4-BE49-F238E27FC236}">
+                <a16:creationId xmlns:a16="http://schemas.microsoft.com/office/drawing/2014/main" id="{50431E2B-1BDA-4171-BB73-4F7D3B18F204}"/>
+              </a:ext>
+            </a:extLst>
+          </p:cNvPr>
+          <p:cNvSpPr>
+            <a:spLocks noGrp="1"/>
+          </p:cNvSpPr>
+          <p:nvPr>
+            <p:ph type="title"/>
+          </p:nvPr>
+        </p:nvSpPr>
+        <p:spPr/>
+        <p:txBody>
+          <a:bodyPr/>
+          <a:lstStyle/>
+          <a:p>
+            <a:r>
+              <a:rPr lang="pt-BR" dirty="0"/>
+              <a:t>Sintaxe</a:t>
+            </a:r>
+          </a:p>
+        </p:txBody>
+      </p:sp>
+      <p:sp>
+        <p:nvSpPr>
+          <p:cNvPr id="4" name="Retângulo 3">
+            <a:extLst>
+              <a:ext uri="{FF2B5EF4-FFF2-40B4-BE49-F238E27FC236}">
+                <a16:creationId xmlns:a16="http://schemas.microsoft.com/office/drawing/2014/main" id="{2B891AA4-3BD5-40B8-80D9-CB7A73F24210}"/>
+              </a:ext>
+            </a:extLst>
+          </p:cNvPr>
+          <p:cNvSpPr/>
+          <p:nvPr/>
+        </p:nvSpPr>
+        <p:spPr>
+          <a:xfrm>
+            <a:off x="749185" y="4375618"/>
+            <a:ext cx="9630948" cy="1908215"/>
+          </a:xfrm>
+          <a:prstGeom prst="rect">
+            <a:avLst/>
+          </a:prstGeom>
+        </p:spPr>
+        <p:txBody>
+          <a:bodyPr wrap="square">
+            <a:spAutoFit/>
+          </a:bodyPr>
+          <a:lstStyle/>
+          <a:p>
+            <a:pPr>
+              <a:spcBef>
+                <a:spcPts val="150"/>
+              </a:spcBef>
+              <a:spcAft>
+                <a:spcPts val="150"/>
+              </a:spcAft>
+            </a:pPr>
+            <a:r>
+              <a:rPr lang="pt-BR" sz="1400" b="1" dirty="0" err="1">
+                <a:solidFill>
+                  <a:srgbClr val="7F0055"/>
+                </a:solidFill>
+                <a:latin typeface="Consolas" panose="020B0609020204030204" pitchFamily="49" charset="0"/>
+              </a:rPr>
+              <a:t>public</a:t>
+            </a:r>
+            <a:r>
+              <a:rPr lang="pt-BR" sz="1400" dirty="0">
+                <a:solidFill>
+                  <a:srgbClr val="000000"/>
+                </a:solidFill>
+                <a:latin typeface="Consolas" panose="020B0609020204030204" pitchFamily="49" charset="0"/>
+              </a:rPr>
+              <a:t> </a:t>
+            </a:r>
+            <a:r>
+              <a:rPr lang="pt-BR" sz="1400" b="1" dirty="0" err="1">
+                <a:solidFill>
+                  <a:srgbClr val="7F0055"/>
+                </a:solidFill>
+                <a:latin typeface="Consolas" panose="020B0609020204030204" pitchFamily="49" charset="0"/>
+              </a:rPr>
+              <a:t>class</a:t>
+            </a:r>
+            <a:r>
+              <a:rPr lang="pt-BR" sz="1400" dirty="0">
+                <a:solidFill>
+                  <a:srgbClr val="000000"/>
+                </a:solidFill>
+                <a:latin typeface="Consolas" panose="020B0609020204030204" pitchFamily="49" charset="0"/>
+              </a:rPr>
+              <a:t> </a:t>
+            </a:r>
+            <a:r>
+              <a:rPr lang="pt-BR" sz="1400" dirty="0" err="1">
+                <a:solidFill>
+                  <a:srgbClr val="000000"/>
+                </a:solidFill>
+                <a:latin typeface="Consolas" panose="020B0609020204030204" pitchFamily="49" charset="0"/>
+              </a:rPr>
+              <a:t>PagamentoPix</a:t>
+            </a:r>
+            <a:r>
+              <a:rPr lang="pt-BR" sz="1400" dirty="0">
+                <a:solidFill>
+                  <a:srgbClr val="000000"/>
+                </a:solidFill>
+                <a:latin typeface="Consolas" panose="020B0609020204030204" pitchFamily="49" charset="0"/>
+              </a:rPr>
+              <a:t> </a:t>
+            </a:r>
+            <a:r>
+              <a:rPr lang="pt-BR" sz="1400" b="1" dirty="0" err="1">
+                <a:solidFill>
+                  <a:srgbClr val="7F0055"/>
+                </a:solidFill>
+                <a:latin typeface="Consolas" panose="020B0609020204030204" pitchFamily="49" charset="0"/>
+              </a:rPr>
+              <a:t>implements</a:t>
+            </a:r>
+            <a:r>
+              <a:rPr lang="pt-BR" sz="1400" b="1" dirty="0">
+                <a:solidFill>
+                  <a:srgbClr val="7F0055"/>
+                </a:solidFill>
+                <a:latin typeface="Consolas" panose="020B0609020204030204" pitchFamily="49" charset="0"/>
+              </a:rPr>
+              <a:t> </a:t>
+            </a:r>
+            <a:r>
+              <a:rPr lang="pt-BR" sz="1400" b="1" dirty="0" err="1">
+                <a:solidFill>
+                  <a:srgbClr val="0000C0"/>
+                </a:solidFill>
+                <a:latin typeface="Consolas" panose="020B0609020204030204" pitchFamily="49" charset="0"/>
+              </a:rPr>
+              <a:t>F</a:t>
+            </a:r>
+            <a:r>
+              <a:rPr lang="pt-BR" sz="1400" dirty="0" err="1">
+                <a:solidFill>
+                  <a:srgbClr val="0000C0"/>
+                </a:solidFill>
+                <a:latin typeface="Consolas" panose="020B0609020204030204" pitchFamily="49" charset="0"/>
+              </a:rPr>
+              <a:t>ormaPagamento</a:t>
+            </a:r>
+            <a:r>
+              <a:rPr lang="pt-BR" sz="1400" dirty="0">
+                <a:solidFill>
+                  <a:srgbClr val="000000"/>
+                </a:solidFill>
+                <a:latin typeface="Consolas" panose="020B0609020204030204" pitchFamily="49" charset="0"/>
+              </a:rPr>
+              <a:t>{</a:t>
+            </a:r>
+          </a:p>
+          <a:p>
+            <a:pPr lvl="1">
+              <a:spcBef>
+                <a:spcPts val="150"/>
+              </a:spcBef>
+              <a:spcAft>
+                <a:spcPts val="150"/>
+              </a:spcAft>
+            </a:pPr>
+            <a:endParaRPr lang="pt-BR" sz="1400" b="1" dirty="0">
+              <a:solidFill>
+                <a:srgbClr val="7F0055"/>
+              </a:solidFill>
+              <a:latin typeface="Consolas" panose="020B0609020204030204" pitchFamily="49" charset="0"/>
+            </a:endParaRPr>
+          </a:p>
+          <a:p>
+            <a:pPr lvl="1">
+              <a:spcBef>
+                <a:spcPts val="150"/>
+              </a:spcBef>
+              <a:spcAft>
+                <a:spcPts val="150"/>
+              </a:spcAft>
+            </a:pPr>
+            <a:r>
+              <a:rPr lang="pt-BR" sz="1400" dirty="0">
+                <a:solidFill>
+                  <a:srgbClr val="000000"/>
+                </a:solidFill>
+                <a:latin typeface="Consolas" panose="020B0609020204030204" pitchFamily="49" charset="0"/>
+              </a:rPr>
+              <a:t>@</a:t>
+            </a:r>
+            <a:r>
+              <a:rPr lang="pt-BR" sz="1400" dirty="0" err="1">
+                <a:solidFill>
+                  <a:srgbClr val="0000C0"/>
+                </a:solidFill>
+                <a:latin typeface="Consolas" panose="020B0609020204030204" pitchFamily="49" charset="0"/>
+              </a:rPr>
+              <a:t>Override</a:t>
+            </a:r>
+            <a:endParaRPr lang="pt-BR" sz="1400" b="1" dirty="0">
+              <a:solidFill>
+                <a:srgbClr val="7F0055"/>
+              </a:solidFill>
+              <a:latin typeface="Consolas" panose="020B0609020204030204" pitchFamily="49" charset="0"/>
+            </a:endParaRPr>
+          </a:p>
+          <a:p>
+            <a:pPr lvl="1">
+              <a:spcBef>
+                <a:spcPts val="150"/>
+              </a:spcBef>
+              <a:spcAft>
+                <a:spcPts val="150"/>
+              </a:spcAft>
+            </a:pPr>
+            <a:r>
+              <a:rPr lang="pt-BR" sz="1400" b="1" dirty="0" err="1">
+                <a:solidFill>
+                  <a:srgbClr val="7F0055"/>
+                </a:solidFill>
+                <a:latin typeface="Consolas" panose="020B0609020204030204" pitchFamily="49" charset="0"/>
+              </a:rPr>
+              <a:t>public</a:t>
+            </a:r>
+            <a:r>
+              <a:rPr lang="pt-BR" sz="1400" b="1" dirty="0">
+                <a:solidFill>
+                  <a:srgbClr val="7F0055"/>
+                </a:solidFill>
+                <a:latin typeface="Consolas" panose="020B0609020204030204" pitchFamily="49" charset="0"/>
+              </a:rPr>
+              <a:t> </a:t>
+            </a:r>
+            <a:r>
+              <a:rPr lang="pt-BR" sz="1400" b="1" dirty="0" err="1">
+                <a:solidFill>
+                  <a:srgbClr val="7F0055"/>
+                </a:solidFill>
+                <a:latin typeface="Consolas" panose="020B0609020204030204" pitchFamily="49" charset="0"/>
+              </a:rPr>
+              <a:t>void</a:t>
+            </a:r>
+            <a:r>
+              <a:rPr lang="pt-BR" sz="1400" b="1" dirty="0">
+                <a:solidFill>
+                  <a:srgbClr val="000000"/>
+                </a:solidFill>
+                <a:latin typeface="Consolas" panose="020B0609020204030204" pitchFamily="49" charset="0"/>
+              </a:rPr>
+              <a:t> pagar</a:t>
+            </a:r>
+            <a:r>
+              <a:rPr lang="pt-BR" sz="1400" dirty="0">
+                <a:solidFill>
+                  <a:srgbClr val="000000"/>
+                </a:solidFill>
+                <a:latin typeface="Consolas" panose="020B0609020204030204" pitchFamily="49" charset="0"/>
+              </a:rPr>
+              <a:t>(</a:t>
+            </a:r>
+            <a:r>
+              <a:rPr lang="pt-BR" sz="1400" dirty="0" err="1">
+                <a:solidFill>
+                  <a:srgbClr val="000000"/>
+                </a:solidFill>
+                <a:latin typeface="Consolas" panose="020B0609020204030204" pitchFamily="49" charset="0"/>
+              </a:rPr>
+              <a:t>double</a:t>
+            </a:r>
+            <a:r>
+              <a:rPr lang="pt-BR" sz="1400" dirty="0">
+                <a:solidFill>
+                  <a:srgbClr val="000000"/>
+                </a:solidFill>
+                <a:latin typeface="Consolas" panose="020B0609020204030204" pitchFamily="49" charset="0"/>
+              </a:rPr>
+              <a:t> </a:t>
+            </a:r>
+            <a:r>
+              <a:rPr lang="pt-BR" sz="1400" dirty="0">
+                <a:solidFill>
+                  <a:srgbClr val="6A3E3E"/>
+                </a:solidFill>
+                <a:latin typeface="Consolas" panose="020B0609020204030204" pitchFamily="49" charset="0"/>
+              </a:rPr>
+              <a:t>valor</a:t>
+            </a:r>
+            <a:r>
+              <a:rPr lang="pt-BR" sz="1400" dirty="0">
+                <a:solidFill>
+                  <a:srgbClr val="000000"/>
+                </a:solidFill>
+                <a:latin typeface="Consolas" panose="020B0609020204030204" pitchFamily="49" charset="0"/>
+              </a:rPr>
+              <a:t>) {</a:t>
+            </a:r>
+          </a:p>
+          <a:p>
+            <a:pPr lvl="2">
+              <a:spcBef>
+                <a:spcPts val="150"/>
+              </a:spcBef>
+              <a:spcAft>
+                <a:spcPts val="150"/>
+              </a:spcAft>
+            </a:pPr>
+            <a:r>
+              <a:rPr lang="pt-BR" sz="1400" dirty="0" err="1">
+                <a:solidFill>
+                  <a:srgbClr val="0000C0"/>
+                </a:solidFill>
+                <a:latin typeface="Consolas" panose="020B0609020204030204" pitchFamily="49" charset="0"/>
+              </a:rPr>
+              <a:t>System.out.println</a:t>
+            </a:r>
+            <a:r>
+              <a:rPr lang="pt-BR" sz="1400" dirty="0">
+                <a:solidFill>
+                  <a:srgbClr val="000000"/>
+                </a:solidFill>
+                <a:latin typeface="Consolas" panose="020B0609020204030204" pitchFamily="49" charset="0"/>
+              </a:rPr>
+              <a:t>(“Pagamento de R$” + </a:t>
+            </a:r>
+            <a:r>
+              <a:rPr lang="pt-BR" sz="1400" dirty="0">
+                <a:solidFill>
+                  <a:srgbClr val="6A3E3E"/>
+                </a:solidFill>
+                <a:latin typeface="Consolas" panose="020B0609020204030204" pitchFamily="49" charset="0"/>
+              </a:rPr>
+              <a:t>valor </a:t>
+            </a:r>
+            <a:r>
+              <a:rPr lang="pt-BR" sz="1400" dirty="0">
+                <a:solidFill>
+                  <a:srgbClr val="000000"/>
+                </a:solidFill>
+                <a:latin typeface="Consolas" panose="020B0609020204030204" pitchFamily="49" charset="0"/>
+              </a:rPr>
+              <a:t>+ “ realizado via PIX”);</a:t>
+            </a:r>
+          </a:p>
+          <a:p>
+            <a:pPr lvl="1">
+              <a:spcBef>
+                <a:spcPts val="150"/>
+              </a:spcBef>
+              <a:spcAft>
+                <a:spcPts val="150"/>
+              </a:spcAft>
+            </a:pPr>
+            <a:r>
+              <a:rPr lang="pt-BR" sz="1400" dirty="0">
+                <a:solidFill>
+                  <a:srgbClr val="000000"/>
+                </a:solidFill>
+                <a:latin typeface="Consolas" panose="020B0609020204030204" pitchFamily="49" charset="0"/>
+              </a:rPr>
+              <a:t>}</a:t>
+            </a:r>
+          </a:p>
+          <a:p>
+            <a:pPr>
+              <a:spcBef>
+                <a:spcPts val="150"/>
+              </a:spcBef>
+              <a:spcAft>
+                <a:spcPts val="150"/>
+              </a:spcAft>
+            </a:pPr>
+            <a:r>
+              <a:rPr lang="pt-BR" sz="1400" dirty="0">
+                <a:solidFill>
+                  <a:srgbClr val="000000"/>
+                </a:solidFill>
+                <a:latin typeface="Consolas" panose="020B0609020204030204" pitchFamily="49" charset="0"/>
+              </a:rPr>
+              <a:t>}</a:t>
+            </a:r>
+          </a:p>
+        </p:txBody>
+      </p:sp>
+      <p:sp>
+        <p:nvSpPr>
+          <p:cNvPr id="5" name="Retângulo 4">
+            <a:extLst>
+              <a:ext uri="{FF2B5EF4-FFF2-40B4-BE49-F238E27FC236}">
+                <a16:creationId xmlns:a16="http://schemas.microsoft.com/office/drawing/2014/main" id="{8B19854B-AB8E-441B-9202-05B619176719}"/>
+              </a:ext>
+            </a:extLst>
+          </p:cNvPr>
+          <p:cNvSpPr/>
+          <p:nvPr/>
+        </p:nvSpPr>
+        <p:spPr>
+          <a:xfrm>
+            <a:off x="749185" y="2482382"/>
+            <a:ext cx="7361854" cy="1107996"/>
+          </a:xfrm>
+          <a:prstGeom prst="rect">
+            <a:avLst/>
+          </a:prstGeom>
+        </p:spPr>
+        <p:txBody>
+          <a:bodyPr wrap="square">
+            <a:spAutoFit/>
+          </a:bodyPr>
+          <a:lstStyle/>
+          <a:p>
+            <a:pPr>
+              <a:spcBef>
+                <a:spcPts val="150"/>
+              </a:spcBef>
+              <a:spcAft>
+                <a:spcPts val="150"/>
+              </a:spcAft>
+            </a:pPr>
+            <a:r>
+              <a:rPr lang="pt-BR" sz="1400" b="1" dirty="0" err="1">
+                <a:solidFill>
+                  <a:srgbClr val="7F0055"/>
+                </a:solidFill>
+                <a:latin typeface="Consolas" panose="020B0609020204030204" pitchFamily="49" charset="0"/>
+              </a:rPr>
+              <a:t>public</a:t>
+            </a:r>
+            <a:r>
+              <a:rPr lang="pt-BR" sz="1400" dirty="0">
+                <a:solidFill>
+                  <a:srgbClr val="000000"/>
+                </a:solidFill>
+                <a:latin typeface="Consolas" panose="020B0609020204030204" pitchFamily="49" charset="0"/>
+              </a:rPr>
+              <a:t> </a:t>
+            </a:r>
+            <a:r>
+              <a:rPr lang="pt-BR" sz="1400" b="1" dirty="0">
+                <a:solidFill>
+                  <a:srgbClr val="7F0055"/>
+                </a:solidFill>
+                <a:latin typeface="Consolas" panose="020B0609020204030204" pitchFamily="49" charset="0"/>
+              </a:rPr>
+              <a:t>interface</a:t>
+            </a:r>
+            <a:r>
+              <a:rPr lang="pt-BR" sz="1400" dirty="0">
+                <a:solidFill>
+                  <a:srgbClr val="000000"/>
+                </a:solidFill>
+                <a:latin typeface="Consolas" panose="020B0609020204030204" pitchFamily="49" charset="0"/>
+              </a:rPr>
+              <a:t> </a:t>
+            </a:r>
+            <a:r>
+              <a:rPr lang="pt-BR" sz="1400" dirty="0" err="1">
+                <a:solidFill>
+                  <a:srgbClr val="0000C0"/>
+                </a:solidFill>
+                <a:latin typeface="Consolas" panose="020B0609020204030204" pitchFamily="49" charset="0"/>
+              </a:rPr>
+              <a:t>FormaPagamento</a:t>
+            </a:r>
+            <a:r>
+              <a:rPr lang="pt-BR" sz="1400" dirty="0">
+                <a:solidFill>
+                  <a:srgbClr val="0000C0"/>
+                </a:solidFill>
+                <a:latin typeface="Consolas" panose="020B0609020204030204" pitchFamily="49" charset="0"/>
+              </a:rPr>
+              <a:t> </a:t>
+            </a:r>
+            <a:r>
+              <a:rPr lang="pt-BR" sz="1400" dirty="0">
+                <a:solidFill>
+                  <a:srgbClr val="000000"/>
+                </a:solidFill>
+                <a:latin typeface="Consolas" panose="020B0609020204030204" pitchFamily="49" charset="0"/>
+              </a:rPr>
+              <a:t>{</a:t>
+            </a:r>
+            <a:endParaRPr lang="pt-BR" sz="1400" b="1" dirty="0">
+              <a:solidFill>
+                <a:srgbClr val="7F0055"/>
+              </a:solidFill>
+              <a:latin typeface="Consolas" panose="020B0609020204030204" pitchFamily="49" charset="0"/>
+            </a:endParaRPr>
+          </a:p>
+          <a:p>
+            <a:pPr lvl="1">
+              <a:spcBef>
+                <a:spcPts val="150"/>
+              </a:spcBef>
+              <a:spcAft>
+                <a:spcPts val="150"/>
+              </a:spcAft>
+            </a:pPr>
+            <a:r>
+              <a:rPr lang="pt-BR" sz="1400" b="1" dirty="0" err="1">
+                <a:solidFill>
+                  <a:srgbClr val="7F0055"/>
+                </a:solidFill>
+                <a:latin typeface="Consolas" panose="020B0609020204030204" pitchFamily="49" charset="0"/>
+              </a:rPr>
+              <a:t>void</a:t>
+            </a:r>
+            <a:r>
+              <a:rPr lang="pt-BR" sz="1400" b="1" dirty="0">
+                <a:solidFill>
+                  <a:srgbClr val="7F0055"/>
+                </a:solidFill>
+                <a:latin typeface="Consolas" panose="020B0609020204030204" pitchFamily="49" charset="0"/>
+              </a:rPr>
+              <a:t> </a:t>
+            </a:r>
+            <a:r>
+              <a:rPr lang="pt-BR" sz="1400" dirty="0">
+                <a:solidFill>
+                  <a:srgbClr val="0000C0"/>
+                </a:solidFill>
+                <a:latin typeface="Consolas" panose="020B0609020204030204" pitchFamily="49" charset="0"/>
+              </a:rPr>
+              <a:t>pagar </a:t>
+            </a:r>
+            <a:r>
+              <a:rPr lang="pt-BR" sz="1400" dirty="0">
+                <a:solidFill>
+                  <a:srgbClr val="000000"/>
+                </a:solidFill>
+                <a:latin typeface="Consolas" panose="020B0609020204030204" pitchFamily="49" charset="0"/>
+              </a:rPr>
+              <a:t>(</a:t>
+            </a:r>
+            <a:r>
+              <a:rPr lang="pt-BR" sz="1400" b="1" dirty="0" err="1">
+                <a:solidFill>
+                  <a:srgbClr val="7F0055"/>
+                </a:solidFill>
+                <a:latin typeface="Consolas" panose="020B0609020204030204" pitchFamily="49" charset="0"/>
+              </a:rPr>
+              <a:t>double</a:t>
+            </a:r>
+            <a:r>
+              <a:rPr lang="pt-BR" sz="1400" dirty="0">
+                <a:solidFill>
+                  <a:srgbClr val="000000"/>
+                </a:solidFill>
+                <a:latin typeface="Consolas" panose="020B0609020204030204" pitchFamily="49" charset="0"/>
+              </a:rPr>
+              <a:t> </a:t>
+            </a:r>
+            <a:r>
+              <a:rPr lang="pt-BR" sz="1400" dirty="0">
+                <a:solidFill>
+                  <a:srgbClr val="6A3E3E"/>
+                </a:solidFill>
+                <a:latin typeface="Consolas" panose="020B0609020204030204" pitchFamily="49" charset="0"/>
+              </a:rPr>
+              <a:t>valor</a:t>
+            </a:r>
+            <a:r>
+              <a:rPr lang="pt-BR" sz="1400" dirty="0">
+                <a:solidFill>
+                  <a:srgbClr val="000000"/>
+                </a:solidFill>
+                <a:latin typeface="Consolas" panose="020B0609020204030204" pitchFamily="49" charset="0"/>
+              </a:rPr>
+              <a:t>) {</a:t>
+            </a:r>
+          </a:p>
+          <a:p>
+            <a:pPr lvl="1">
+              <a:spcBef>
+                <a:spcPts val="150"/>
+              </a:spcBef>
+              <a:spcAft>
+                <a:spcPts val="150"/>
+              </a:spcAft>
+            </a:pPr>
+            <a:r>
+              <a:rPr lang="pt-BR" sz="1400" dirty="0">
+                <a:solidFill>
+                  <a:srgbClr val="000000"/>
+                </a:solidFill>
+                <a:latin typeface="Consolas" panose="020B0609020204030204" pitchFamily="49" charset="0"/>
+              </a:rPr>
+              <a:t>}</a:t>
+            </a:r>
+          </a:p>
+          <a:p>
+            <a:pPr>
+              <a:spcBef>
+                <a:spcPts val="150"/>
+              </a:spcBef>
+              <a:spcAft>
+                <a:spcPts val="150"/>
+              </a:spcAft>
+            </a:pPr>
+            <a:r>
+              <a:rPr lang="pt-BR" sz="1400" dirty="0">
+                <a:solidFill>
+                  <a:srgbClr val="000000"/>
+                </a:solidFill>
+                <a:latin typeface="Consolas" panose="020B0609020204030204" pitchFamily="49" charset="0"/>
+              </a:rPr>
+              <a:t>}</a:t>
+            </a:r>
+          </a:p>
+        </p:txBody>
+      </p:sp>
+      <p:sp>
+        <p:nvSpPr>
+          <p:cNvPr id="6" name="Retângulo 5">
+            <a:extLst>
+              <a:ext uri="{FF2B5EF4-FFF2-40B4-BE49-F238E27FC236}">
+                <a16:creationId xmlns:a16="http://schemas.microsoft.com/office/drawing/2014/main" id="{271B2913-B13F-40EE-B7A5-0A14681A8834}"/>
+              </a:ext>
+            </a:extLst>
+          </p:cNvPr>
+          <p:cNvSpPr/>
+          <p:nvPr/>
+        </p:nvSpPr>
+        <p:spPr>
+          <a:xfrm>
+            <a:off x="749185" y="1905096"/>
+            <a:ext cx="2628155" cy="369332"/>
+          </a:xfrm>
+          <a:prstGeom prst="rect">
+            <a:avLst/>
+          </a:prstGeom>
+        </p:spPr>
+        <p:txBody>
+          <a:bodyPr wrap="none">
+            <a:spAutoFit/>
+          </a:bodyPr>
+          <a:lstStyle/>
+          <a:p>
+            <a:r>
+              <a:rPr lang="pt-BR" dirty="0">
+                <a:latin typeface="Times New Roman" panose="02020603050405020304" pitchFamily="18" charset="0"/>
+                <a:cs typeface="Times New Roman" panose="02020603050405020304" pitchFamily="18" charset="0"/>
+              </a:rPr>
+              <a:t>Como criar uma interface:</a:t>
+            </a:r>
+          </a:p>
+        </p:txBody>
+      </p:sp>
+      <p:sp>
+        <p:nvSpPr>
+          <p:cNvPr id="7" name="Retângulo 6">
+            <a:extLst>
+              <a:ext uri="{FF2B5EF4-FFF2-40B4-BE49-F238E27FC236}">
+                <a16:creationId xmlns:a16="http://schemas.microsoft.com/office/drawing/2014/main" id="{E99E9658-624D-4A67-BC93-8D4A3D3740AC}"/>
+              </a:ext>
+            </a:extLst>
+          </p:cNvPr>
+          <p:cNvSpPr/>
+          <p:nvPr/>
+        </p:nvSpPr>
+        <p:spPr>
+          <a:xfrm>
+            <a:off x="749184" y="3798332"/>
+            <a:ext cx="3355790" cy="369332"/>
+          </a:xfrm>
+          <a:prstGeom prst="rect">
+            <a:avLst/>
+          </a:prstGeom>
+        </p:spPr>
+        <p:txBody>
+          <a:bodyPr wrap="none">
+            <a:spAutoFit/>
+          </a:bodyPr>
+          <a:lstStyle/>
+          <a:p>
+            <a:r>
+              <a:rPr lang="pt-BR" dirty="0">
+                <a:latin typeface="Times New Roman" panose="02020603050405020304" pitchFamily="18" charset="0"/>
+                <a:cs typeface="Times New Roman" panose="02020603050405020304" pitchFamily="18" charset="0"/>
+              </a:rPr>
+              <a:t>Como implementar uma interface</a:t>
+            </a:r>
+          </a:p>
+        </p:txBody>
+      </p:sp>
+    </p:spTree>
+    <p:extLst>
+      <p:ext uri="{BB962C8B-B14F-4D97-AF65-F5344CB8AC3E}">
+        <p14:creationId xmlns:p14="http://schemas.microsoft.com/office/powerpoint/2010/main" val="2145790061"/>
+      </p:ext>
+    </p:extLst>
+  </p:cSld>
+  <p:clrMapOvr>
+    <a:masterClrMapping/>
+  </p:clrMapOvr>
+</p:sld>
+</file>
+
+<file path=ppt/slides/slide14.xml><?xml version="1.0" encoding="utf-8"?>
+<p:sld xmlns:a="http://schemas.openxmlformats.org/drawingml/2006/main" xmlns:r="http://schemas.openxmlformats.org/officeDocument/2006/relationships" xmlns:p="http://schemas.openxmlformats.org/presentationml/2006/main">
+  <p:cSld>
+    <p:spTree>
+      <p:nvGrpSpPr>
+        <p:cNvPr id="1" name=""/>
+        <p:cNvGrpSpPr/>
+        <p:nvPr/>
+      </p:nvGrpSpPr>
+      <p:grpSpPr>
+        <a:xfrm>
+          <a:off x="0" y="0"/>
+          <a:ext cx="0" cy="0"/>
+          <a:chOff x="0" y="0"/>
+          <a:chExt cx="0" cy="0"/>
+        </a:xfrm>
+      </p:grpSpPr>
+      <p:sp>
+        <p:nvSpPr>
+          <p:cNvPr id="2" name="Título 1">
+            <a:extLst>
+              <a:ext uri="{FF2B5EF4-FFF2-40B4-BE49-F238E27FC236}">
+                <a16:creationId xmlns:a16="http://schemas.microsoft.com/office/drawing/2014/main" id="{98F55CF7-7DD5-478F-8B89-574E79ED855F}"/>
+              </a:ext>
+            </a:extLst>
+          </p:cNvPr>
+          <p:cNvSpPr>
+            <a:spLocks noGrp="1"/>
+          </p:cNvSpPr>
+          <p:nvPr>
+            <p:ph type="title"/>
+          </p:nvPr>
+        </p:nvSpPr>
+        <p:spPr/>
+        <p:txBody>
+          <a:bodyPr/>
+          <a:lstStyle/>
+          <a:p>
+            <a:r>
+              <a:rPr lang="pt-BR" dirty="0"/>
               <a:t>Projeto: Sistema para Locadora de Veículos</a:t>
             </a:r>
           </a:p>
@@ -5330,9 +6376,12 @@
           <a:lstStyle/>
           <a:p>
             <a:r>
-              <a:rPr lang="pt-BR" dirty="0"/>
+              <a:rPr lang="pt-BR" sz="1800" dirty="0"/>
               <a:t>O projeto consiste em um sistema que gerencia os veículos disponíveis para aluguel em uma locadora. Cada veículo pode ter características específicas, como tipo (carro, moto ou caminhão), capacidade de passageiros, valor da diária, entre outros. O sistema deve permitir:</a:t>
             </a:r>
+          </a:p>
+          <a:p>
+            <a:endParaRPr lang="pt-BR" sz="1800" dirty="0"/>
           </a:p>
           <a:p>
             <a:pPr marL="1028700" lvl="1" indent="-342900"/>
@@ -5377,7 +6426,7 @@
 </p:sld>
 </file>
 
-<file path=ppt/slides/slide13.xml><?xml version="1.0" encoding="utf-8"?>
+<file path=ppt/slides/slide15.xml><?xml version="1.0" encoding="utf-8"?>
 <p:sld xmlns:a="http://schemas.openxmlformats.org/drawingml/2006/main" xmlns:r="http://schemas.openxmlformats.org/officeDocument/2006/relationships" xmlns:p="http://schemas.openxmlformats.org/presentationml/2006/main">
   <p:cSld>
     <p:spTree>
